--- a/ahnsung/watch_verification.pptx
+++ b/ahnsung/watch_verification.pptx
@@ -5,7 +5,7 @@
     <p:sldMasterId id="2147483648" r:id="rId1"/>
   </p:sldMasterIdLst>
   <p:notesMasterIdLst>
-    <p:notesMasterId r:id="rId15"/>
+    <p:notesMasterId r:id="rId16"/>
   </p:notesMasterIdLst>
   <p:sldIdLst>
     <p:sldId id="258" r:id="rId2"/>
@@ -21,6 +21,7 @@
     <p:sldId id="275" r:id="rId12"/>
     <p:sldId id="276" r:id="rId13"/>
     <p:sldId id="277" r:id="rId14"/>
+    <p:sldId id="278" r:id="rId15"/>
   </p:sldIdLst>
   <p:sldSz cx="12192000" cy="6858000"/>
   <p:notesSz cx="6858000" cy="9144000"/>
@@ -209,7 +210,7 @@
           <a:p>
             <a:fld id="{0FF0A4B3-CA1E-4FF1-8F8B-7B92F1823D8C}" type="datetimeFigureOut">
               <a:rPr lang="ko-KR" altLang="en-US" smtClean="0"/>
-              <a:t>2026-10-17</a:t>
+              <a:t>2026-10-18</a:t>
             </a:fld>
             <a:endParaRPr lang="ko-KR" altLang="en-US"/>
           </a:p>
@@ -623,7 +624,7 @@
           <a:p>
             <a:fld id="{EC5ADE31-F0DA-4525-8F7E-DAF618595163}" type="datetimeFigureOut">
               <a:rPr lang="ko-KR" altLang="en-US" smtClean="0"/>
-              <a:t>2026-10-17</a:t>
+              <a:t>2026-10-18</a:t>
             </a:fld>
             <a:endParaRPr lang="ko-KR" altLang="en-US"/>
           </a:p>
@@ -821,7 +822,7 @@
           <a:p>
             <a:fld id="{EC5ADE31-F0DA-4525-8F7E-DAF618595163}" type="datetimeFigureOut">
               <a:rPr lang="ko-KR" altLang="en-US" smtClean="0"/>
-              <a:t>2026-10-17</a:t>
+              <a:t>2026-10-18</a:t>
             </a:fld>
             <a:endParaRPr lang="ko-KR" altLang="en-US"/>
           </a:p>
@@ -1029,7 +1030,7 @@
           <a:p>
             <a:fld id="{EC5ADE31-F0DA-4525-8F7E-DAF618595163}" type="datetimeFigureOut">
               <a:rPr lang="ko-KR" altLang="en-US" smtClean="0"/>
-              <a:t>2026-10-17</a:t>
+              <a:t>2026-10-18</a:t>
             </a:fld>
             <a:endParaRPr lang="ko-KR" altLang="en-US"/>
           </a:p>
@@ -1227,7 +1228,7 @@
           <a:p>
             <a:fld id="{EC5ADE31-F0DA-4525-8F7E-DAF618595163}" type="datetimeFigureOut">
               <a:rPr lang="ko-KR" altLang="en-US" smtClean="0"/>
-              <a:t>2026-10-17</a:t>
+              <a:t>2026-10-18</a:t>
             </a:fld>
             <a:endParaRPr lang="ko-KR" altLang="en-US"/>
           </a:p>
@@ -1502,7 +1503,7 @@
           <a:p>
             <a:fld id="{EC5ADE31-F0DA-4525-8F7E-DAF618595163}" type="datetimeFigureOut">
               <a:rPr lang="ko-KR" altLang="en-US" smtClean="0"/>
-              <a:t>2026-10-17</a:t>
+              <a:t>2026-10-18</a:t>
             </a:fld>
             <a:endParaRPr lang="ko-KR" altLang="en-US"/>
           </a:p>
@@ -1767,7 +1768,7 @@
           <a:p>
             <a:fld id="{EC5ADE31-F0DA-4525-8F7E-DAF618595163}" type="datetimeFigureOut">
               <a:rPr lang="ko-KR" altLang="en-US" smtClean="0"/>
-              <a:t>2026-10-17</a:t>
+              <a:t>2026-10-18</a:t>
             </a:fld>
             <a:endParaRPr lang="ko-KR" altLang="en-US"/>
           </a:p>
@@ -2179,7 +2180,7 @@
           <a:p>
             <a:fld id="{EC5ADE31-F0DA-4525-8F7E-DAF618595163}" type="datetimeFigureOut">
               <a:rPr lang="ko-KR" altLang="en-US" smtClean="0"/>
-              <a:t>2026-10-17</a:t>
+              <a:t>2026-10-18</a:t>
             </a:fld>
             <a:endParaRPr lang="ko-KR" altLang="en-US"/>
           </a:p>
@@ -2320,7 +2321,7 @@
           <a:p>
             <a:fld id="{EC5ADE31-F0DA-4525-8F7E-DAF618595163}" type="datetimeFigureOut">
               <a:rPr lang="ko-KR" altLang="en-US" smtClean="0"/>
-              <a:t>2026-10-17</a:t>
+              <a:t>2026-10-18</a:t>
             </a:fld>
             <a:endParaRPr lang="ko-KR" altLang="en-US"/>
           </a:p>
@@ -2433,7 +2434,7 @@
           <a:p>
             <a:fld id="{EC5ADE31-F0DA-4525-8F7E-DAF618595163}" type="datetimeFigureOut">
               <a:rPr lang="ko-KR" altLang="en-US" smtClean="0"/>
-              <a:t>2026-10-17</a:t>
+              <a:t>2026-10-18</a:t>
             </a:fld>
             <a:endParaRPr lang="ko-KR" altLang="en-US"/>
           </a:p>
@@ -2744,7 +2745,7 @@
           <a:p>
             <a:fld id="{EC5ADE31-F0DA-4525-8F7E-DAF618595163}" type="datetimeFigureOut">
               <a:rPr lang="ko-KR" altLang="en-US" smtClean="0"/>
-              <a:t>2026-10-17</a:t>
+              <a:t>2026-10-18</a:t>
             </a:fld>
             <a:endParaRPr lang="ko-KR" altLang="en-US"/>
           </a:p>
@@ -3032,7 +3033,7 @@
           <a:p>
             <a:fld id="{EC5ADE31-F0DA-4525-8F7E-DAF618595163}" type="datetimeFigureOut">
               <a:rPr lang="ko-KR" altLang="en-US" smtClean="0"/>
-              <a:t>2026-10-17</a:t>
+              <a:t>2026-10-18</a:t>
             </a:fld>
             <a:endParaRPr lang="ko-KR" altLang="en-US"/>
           </a:p>
@@ -3273,7 +3274,7 @@
           <a:p>
             <a:fld id="{EC5ADE31-F0DA-4525-8F7E-DAF618595163}" type="datetimeFigureOut">
               <a:rPr lang="ko-KR" altLang="en-US" smtClean="0"/>
-              <a:t>2026-10-17</a:t>
+              <a:t>2026-10-18</a:t>
             </a:fld>
             <a:endParaRPr lang="ko-KR" altLang="en-US"/>
           </a:p>
@@ -9931,6 +9932,36 @@
     <p:extLst>
       <p:ext uri="{BB962C8B-B14F-4D97-AF65-F5344CB8AC3E}">
         <p14:creationId xmlns:p14="http://schemas.microsoft.com/office/powerpoint/2010/main" val="3159039887"/>
+      </p:ext>
+    </p:extLst>
+  </p:cSld>
+  <p:clrMapOvr>
+    <a:masterClrMapping/>
+  </p:clrMapOvr>
+</p:sld>
+</file>
+
+<file path=ppt/slides/slide14.xml><?xml version="1.0" encoding="utf-8"?>
+<p:sld xmlns:a="http://schemas.openxmlformats.org/drawingml/2006/main" xmlns:r="http://schemas.openxmlformats.org/officeDocument/2006/relationships" xmlns:p="http://schemas.openxmlformats.org/presentationml/2006/main">
+  <p:cSld>
+    <p:spTree>
+      <p:nvGrpSpPr>
+        <p:cNvPr id="1" name=""/>
+        <p:cNvGrpSpPr/>
+        <p:nvPr/>
+      </p:nvGrpSpPr>
+      <p:grpSpPr>
+        <a:xfrm>
+          <a:off x="0" y="0"/>
+          <a:ext cx="0" cy="0"/>
+          <a:chOff x="0" y="0"/>
+          <a:chExt cx="0" cy="0"/>
+        </a:xfrm>
+      </p:grpSpPr>
+    </p:spTree>
+    <p:extLst>
+      <p:ext uri="{BB962C8B-B14F-4D97-AF65-F5344CB8AC3E}">
+        <p14:creationId xmlns:p14="http://schemas.microsoft.com/office/powerpoint/2010/main" val="1023719977"/>
       </p:ext>
     </p:extLst>
   </p:cSld>
